--- a/classes/parte-10-seguridad-en-la-nube-y-contenedores/228-seguridad-de-kubernetes-arquitectura/clase-228-presentacion.pptx
+++ b/classes/parte-10-seguridad-en-la-nube-y-contenedores/228-seguridad-de-kubernetes-arquitectura/clase-228-presentacion.pptx
@@ -17,6 +17,10 @@
     <p:sldId id="265" r:id="rId16"/>
     <p:sldId id="266" r:id="rId17"/>
     <p:sldId id="267" r:id="rId18"/>
+    <p:sldId id="268" r:id="rId19"/>
+    <p:sldId id="269" r:id="rId20"/>
+    <p:sldId id="270" r:id="rId21"/>
+    <p:sldId id="271" r:id="rId22"/>
   </p:sldIdLst>
   <p:sldSz cx="9144000" cy="6858000" type="screen4x3"/>
   <p:notesSz cx="6858000" cy="9144000"/>
@@ -3198,7 +3202,7 @@
                   <a:srgbClr val="0B3D2E"/>
                 </a:solidFill>
               </a:rPr>
-              <a:t>⚠️ Errores comunes</a:t>
+              <a:t>🧪 Laboratorio guiado</a:t>
             </a:r>
           </a:p>
         </p:txBody>
@@ -3236,67 +3240,97 @@
                   <a:srgbClr val="22282E"/>
                 </a:solidFill>
               </a:rPr>
-              <a:t>•  "Pensé que namespace = aislamiento fuerte" — Los namespaces separan nombres, no red ni kernel; añade NetworkPolicy y RBAC.</a:t>
-            </a:r>
-          </a:p>
-          <a:p>
-            <a:pPr>
-              <a:spcAft>
-                <a:spcPts val="600"/>
-              </a:spcAft>
-            </a:pPr>
-            <a:r>
-              <a:rPr sz="1500">
-                <a:solidFill>
-                  <a:srgbClr val="22282E"/>
-                </a:solidFill>
-              </a:rPr>
-              <a:t>•  Token de ServiceAccount montado sin necesidad — Riesgo si el pod se compromete; usa automountServiceAccountToken: false.</a:t>
-            </a:r>
-          </a:p>
-          <a:p>
-            <a:pPr>
-              <a:spcAft>
-                <a:spcPts val="600"/>
-              </a:spcAft>
-            </a:pPr>
-            <a:r>
-              <a:rPr sz="1500">
-                <a:solidFill>
-                  <a:srgbClr val="22282E"/>
-                </a:solidFill>
-              </a:rPr>
-              <a:t>•  etcd accesible sin TLS — Exposición total del estado; exige TLS mutuo y restringe el acceso.</a:t>
-            </a:r>
-          </a:p>
-          <a:p>
-            <a:pPr>
-              <a:spcAft>
-                <a:spcPts val="600"/>
-              </a:spcAft>
-            </a:pPr>
-            <a:r>
-              <a:rPr sz="1500">
-                <a:solidFill>
-                  <a:srgbClr val="22282E"/>
-                </a:solidFill>
-              </a:rPr>
-              <a:t>•  Forbidden al aplicar un manifiesto — RBAC deniega la acción; ajusta el Role/Binding de la identidad.</a:t>
-            </a:r>
-          </a:p>
-          <a:p>
-            <a:pPr>
-              <a:spcAft>
-                <a:spcPts val="600"/>
-              </a:spcAft>
-            </a:pPr>
-            <a:r>
-              <a:rPr sz="1500">
-                <a:solidFill>
-                  <a:srgbClr val="22282E"/>
-                </a:solidFill>
-              </a:rPr>
-              <a:t>•  kubelet API abierta en 10250 — Permite exec en pods; exige autenticación y autorización webhook.</a:t>
+              <a:t>•  Crea un clúster con kind create cluster y examina los pods de kube-system (API server, etcd, scheduler, controller-manager, kube-proxy, CoreDNS).</a:t>
+            </a:r>
+          </a:p>
+          <a:p>
+            <a:pPr>
+              <a:spcAft>
+                <a:spcPts val="600"/>
+              </a:spcAft>
+            </a:pPr>
+            <a:r>
+              <a:rPr sz="1500">
+                <a:solidFill>
+                  <a:srgbClr val="22282E"/>
+                </a:solidFill>
+              </a:rPr>
+              <a:t>•  Describe el pod de etcd y localiza dónde guarda los datos; comenta por qué su cifrado en reposo y su acceso restringido son críticos.</a:t>
+            </a:r>
+          </a:p>
+          <a:p>
+            <a:pPr>
+              <a:spcAft>
+                <a:spcPts val="600"/>
+              </a:spcAft>
+            </a:pPr>
+            <a:r>
+              <a:rPr sz="1500">
+                <a:solidFill>
+                  <a:srgbClr val="22282E"/>
+                </a:solidFill>
+              </a:rPr>
+              <a:t>•  Explora el flujo de autorización: usa kubectl auth can-i --list con distintas identidades para ver qué puede hacer cada una.</a:t>
+            </a:r>
+          </a:p>
+          <a:p>
+            <a:pPr>
+              <a:spcAft>
+                <a:spcPts val="600"/>
+              </a:spcAft>
+            </a:pPr>
+            <a:r>
+              <a:rPr sz="1500">
+                <a:solidFill>
+                  <a:srgbClr val="22282E"/>
+                </a:solidFill>
+              </a:rPr>
+              <a:t>•  Crea un namespace app y despliega un pod; observa el ServiceAccount por defecto y su token montado.</a:t>
+            </a:r>
+          </a:p>
+          <a:p>
+            <a:pPr>
+              <a:spcAft>
+                <a:spcPts val="600"/>
+              </a:spcAft>
+            </a:pPr>
+            <a:r>
+              <a:rPr sz="1500">
+                <a:solidFill>
+                  <a:srgbClr val="22282E"/>
+                </a:solidFill>
+              </a:rPr>
+              <a:t>•  Comprueba que, por defecto, un pod puede alcanzar a otro en distinto namespace (sin NetworkPolicy).</a:t>
+            </a:r>
+          </a:p>
+          <a:p>
+            <a:pPr>
+              <a:spcAft>
+                <a:spcPts val="600"/>
+              </a:spcAft>
+            </a:pPr>
+            <a:r>
+              <a:rPr sz="1500">
+                <a:solidFill>
+                  <a:srgbClr val="22282E"/>
+                </a:solidFill>
+              </a:rPr>
+              <a:t>•  Inspecciona la API del kubelet (solo lectura, en laboratorio) y comenta por qué debe requerir autenticación.</a:t>
+            </a:r>
+          </a:p>
+          <a:p>
+            <a:pPr>
+              <a:spcAft>
+                <a:spcPts val="600"/>
+              </a:spcAft>
+            </a:pPr>
+            <a:r>
+              <a:rPr sz="1500">
+                <a:solidFill>
+                  <a:srgbClr val="22282E"/>
+                </a:solidFill>
+              </a:rPr>
+              <a:t>•  Dibuja un diagrama del flujo de una petición kubectl apply: cliente → API server → authn → authz (RBAC) → admission → etcd → controladores → kubelet.</a:t>
             </a:r>
           </a:p>
         </p:txBody>
@@ -3347,7 +3381,7 @@
                   <a:srgbClr val="0B3D2E"/>
                 </a:solidFill>
               </a:rPr>
-              <a:t>❓ Preguntas frecuentes</a:t>
+              <a:t>✍️ Ejercicios</a:t>
             </a:r>
           </a:p>
         </p:txBody>
@@ -3385,82 +3419,82 @@
                   <a:srgbClr val="22282E"/>
                 </a:solidFill>
               </a:rPr>
-              <a:t>•  ❓ ¿Por qué el API server es el objetivo principal de un atacante?</a:t>
-            </a:r>
-          </a:p>
-          <a:p>
-            <a:pPr>
-              <a:spcAft>
-                <a:spcPts val="600"/>
-              </a:spcAft>
-            </a:pPr>
-            <a:r>
-              <a:rPr sz="1500">
-                <a:solidFill>
-                  <a:srgbClr val="22282E"/>
-                </a:solidFill>
-              </a:rPr>
-              <a:t>•  Porque es la única puerta a todo el clúster: quien lo controla puede crear pods, leer Secrets y moverse a los nodos. Por eso su autenticación, RBAC y admission control son la defensa central.</a:t>
-            </a:r>
-          </a:p>
-          <a:p>
-            <a:pPr>
-              <a:spcAft>
-                <a:spcPts val="600"/>
-              </a:spcAft>
-            </a:pPr>
-            <a:r>
-              <a:rPr sz="1500">
-                <a:solidFill>
-                  <a:srgbClr val="22282E"/>
-                </a:solidFill>
-              </a:rPr>
-              <a:t>•  ❓ ¿Qué pasa si un atacante lee etcd directamente?</a:t>
-            </a:r>
-          </a:p>
-          <a:p>
-            <a:pPr>
-              <a:spcAft>
-                <a:spcPts val="600"/>
-              </a:spcAft>
-            </a:pPr>
-            <a:r>
-              <a:rPr sz="1500">
-                <a:solidFill>
-                  <a:srgbClr val="22282E"/>
-                </a:solidFill>
-              </a:rPr>
-              <a:t>•  Obtiene todo el estado, incluidos los Secrets (por defecto solo en base64, no cifrados). Por eso se recomienda cifrado en reposo de etcd y acceso restringido con TLS mutuo.</a:t>
-            </a:r>
-          </a:p>
-          <a:p>
-            <a:pPr>
-              <a:spcAft>
-                <a:spcPts val="600"/>
-              </a:spcAft>
-            </a:pPr>
-            <a:r>
-              <a:rPr sz="1500">
-                <a:solidFill>
-                  <a:srgbClr val="22282E"/>
-                </a:solidFill>
-              </a:rPr>
-              <a:t>•  ❓ ¿RBAC está activo por defecto?</a:t>
-            </a:r>
-          </a:p>
-          <a:p>
-            <a:pPr>
-              <a:spcAft>
-                <a:spcPts val="600"/>
-              </a:spcAft>
-            </a:pPr>
-            <a:r>
-              <a:rPr sz="1500">
-                <a:solidFill>
-                  <a:srgbClr val="22282E"/>
-                </a:solidFill>
-              </a:rPr>
-              <a:t>•  En clústeres modernos sí, pero muchas instalaciones dejan roles amplios o ServiceAccounts con permisos excesivos. RBAC solo protege si se configura con privilegio mínimo.</a:t>
+              <a:t>•  Enumera cada componente del plano de control y una consecuencia de su compromiso.</a:t>
+            </a:r>
+          </a:p>
+          <a:p>
+            <a:pPr>
+              <a:spcAft>
+                <a:spcPts val="600"/>
+              </a:spcAft>
+            </a:pPr>
+            <a:r>
+              <a:rPr sz="1500">
+                <a:solidFill>
+                  <a:srgbClr val="22282E"/>
+                </a:solidFill>
+              </a:rPr>
+              <a:t>•  Explica por qué etcd cifrado en reposo es una defensa clave para los Secrets.</a:t>
+            </a:r>
+          </a:p>
+          <a:p>
+            <a:pPr>
+              <a:spcAft>
+                <a:spcPts val="600"/>
+              </a:spcAft>
+            </a:pPr>
+            <a:r>
+              <a:rPr sz="1500">
+                <a:solidFill>
+                  <a:srgbClr val="22282E"/>
+                </a:solidFill>
+              </a:rPr>
+              <a:t>•  Describe la diferencia entre Role y ClusterRole con un ejemplo.</a:t>
+            </a:r>
+          </a:p>
+          <a:p>
+            <a:pPr>
+              <a:spcAft>
+                <a:spcPts val="600"/>
+              </a:spcAft>
+            </a:pPr>
+            <a:r>
+              <a:rPr sz="1500">
+                <a:solidFill>
+                  <a:srgbClr val="22282E"/>
+                </a:solidFill>
+              </a:rPr>
+              <a:t>•  Identifica qué escucha en los puertos 6443 y 10250 y su riesgo.</a:t>
+            </a:r>
+          </a:p>
+          <a:p>
+            <a:pPr>
+              <a:spcAft>
+                <a:spcPts val="600"/>
+              </a:spcAft>
+            </a:pPr>
+            <a:r>
+              <a:rPr sz="1500">
+                <a:solidFill>
+                  <a:srgbClr val="22282E"/>
+                </a:solidFill>
+              </a:rPr>
+              <a:t>•  Dibuja el flujo authn → authz → admission para una creación de pod.</a:t>
+            </a:r>
+          </a:p>
+          <a:p>
+            <a:pPr>
+              <a:spcAft>
+                <a:spcPts val="600"/>
+              </a:spcAft>
+            </a:pPr>
+            <a:r>
+              <a:rPr sz="1500">
+                <a:solidFill>
+                  <a:srgbClr val="22282E"/>
+                </a:solidFill>
+              </a:rPr>
+              <a:t>•  Explica qué aísla un namespace y qué NO aísla por defecto.</a:t>
             </a:r>
           </a:p>
         </p:txBody>
@@ -3511,7 +3545,7 @@
                   <a:srgbClr val="0B3D2E"/>
                 </a:solidFill>
               </a:rPr>
-              <a:t>🔗 Referencias</a:t>
+              <a:t>📝 Reto verificable</a:t>
             </a:r>
           </a:p>
         </p:txBody>
@@ -3549,71 +3583,623 @@
                   <a:srgbClr val="22282E"/>
                 </a:solidFill>
               </a:rPr>
-              <a:t>•  Martin &amp; Hausenblas, Hacking Kubernetes, O'Reilly. &lt;https://www.oreilly.com/library/view/hacking-kubernetes/9781492081722/&gt;</a:t>
-            </a:r>
-          </a:p>
-          <a:p>
-            <a:pPr>
-              <a:spcAft>
-                <a:spcPts val="600"/>
-              </a:spcAft>
-            </a:pPr>
-            <a:r>
-              <a:rPr sz="1500">
-                <a:solidFill>
-                  <a:srgbClr val="22282E"/>
-                </a:solidFill>
-              </a:rPr>
-              <a:t>•  Kubernetes — Cluster Architecture. &lt;https://kubernetes.io/docs/concepts/architecture/&gt;</a:t>
-            </a:r>
-          </a:p>
-          <a:p>
-            <a:pPr>
-              <a:spcAft>
-                <a:spcPts val="600"/>
-              </a:spcAft>
-            </a:pPr>
-            <a:r>
-              <a:rPr sz="1500">
-                <a:solidFill>
-                  <a:srgbClr val="22282E"/>
-                </a:solidFill>
-              </a:rPr>
-              <a:t>•  Kubernetes — Controlling Access to the API. &lt;https://kubernetes.io/docs/concepts/security/controlling-access/&gt;</a:t>
-            </a:r>
-          </a:p>
-          <a:p>
-            <a:pPr>
-              <a:spcAft>
-                <a:spcPts val="600"/>
-              </a:spcAft>
-            </a:pPr>
-            <a:r>
-              <a:rPr sz="1500">
-                <a:solidFill>
-                  <a:srgbClr val="22282E"/>
-                </a:solidFill>
-              </a:rPr>
-              <a:t>•  Kubernetes — RBAC Authorization. &lt;https://kubernetes.io/docs/reference/access-authn-authz/rbac/&gt;</a:t>
-            </a:r>
-          </a:p>
-          <a:p>
-            <a:pPr>
-              <a:spcAft>
-                <a:spcPts val="600"/>
-              </a:spcAft>
-            </a:pPr>
-            <a:r>
-              <a:rPr sz="1500">
-                <a:solidFill>
-                  <a:srgbClr val="22282E"/>
-                </a:solidFill>
-              </a:rPr>
-              <a:t>•  NIST SP 800-190. &lt;https://csrc.nist.gov/pubs/sp/800/190/final&gt;</a:t>
-            </a:r>
-          </a:p>
-        </p:txBody>
-      </p:sp>
+              <a:t>•  Despliega un clúster de laboratorio y produce un mapa de su superficie de ataque: componentes,</a:t>
+            </a:r>
+          </a:p>
+          <a:p>
+            <a:pPr>
+              <a:spcAft>
+                <a:spcPts val="600"/>
+              </a:spcAft>
+            </a:pPr>
+            <a:r>
+              <a:rPr sz="1500">
+                <a:solidFill>
+                  <a:srgbClr val="22282E"/>
+                </a:solidFill>
+              </a:rPr>
+              <a:t>•  puertos que exponen, identidad que usan y qué protege cada control (RBAC, admission, NetworkPolicy).</a:t>
+            </a:r>
+          </a:p>
+          <a:p>
+            <a:pPr>
+              <a:spcAft>
+                <a:spcPts val="600"/>
+              </a:spcAft>
+            </a:pPr>
+            <a:r>
+              <a:rPr sz="1500">
+                <a:solidFill>
+                  <a:srgbClr val="22282E"/>
+                </a:solidFill>
+              </a:rPr>
+              <a:t>•  Criterio de aceptación: el mapa lista API server, etcd, kubelet y scheduler con su puerto y riesgo;</a:t>
+            </a:r>
+          </a:p>
+          <a:p>
+            <a:pPr>
+              <a:spcAft>
+                <a:spcPts val="600"/>
+              </a:spcAft>
+            </a:pPr>
+            <a:r>
+              <a:rPr sz="1500">
+                <a:solidFill>
+                  <a:srgbClr val="22282E"/>
+                </a:solidFill>
+              </a:rPr>
+              <a:t>•  identifica el flujo authn→authz→admission; y señala al menos tres controles con el objeto Kubernetes</a:t>
+            </a:r>
+          </a:p>
+          <a:p>
+            <a:pPr>
+              <a:spcAft>
+                <a:spcPts val="600"/>
+              </a:spcAft>
+            </a:pPr>
+            <a:r>
+              <a:rPr sz="1500">
+                <a:solidFill>
+                  <a:srgbClr val="22282E"/>
+                </a:solidFill>
+              </a:rPr>
+              <a:t>•  que los implementa.</a:t>
+            </a:r>
+          </a:p>
+        </p:txBody>
+      </p:sp>
+    </p:spTree>
+  </p:cSld>
+  <p:clrMapOvr>
+    <a:masterClrMapping/>
+  </p:clrMapOvr>
+</p:sld>
+</file>
+
+<file path=ppt/slides/slide13.xml><?xml version="1.0" encoding="utf-8"?>
+<p:sld xmlns:a="http://schemas.openxmlformats.org/drawingml/2006/main" xmlns:p="http://schemas.openxmlformats.org/presentationml/2006/main" xmlns:r="http://schemas.openxmlformats.org/officeDocument/2006/relationships">
+  <p:cSld>
+    <p:spTree>
+      <p:nvGrpSpPr>
+        <p:cNvPr id="1" name=""/>
+        <p:cNvGrpSpPr/>
+        <p:nvPr/>
+      </p:nvGrpSpPr>
+      <p:grpSpPr/>
+      <p:sp>
+        <p:nvSpPr>
+          <p:cNvPr id="2" name="TextBox 1"/>
+          <p:cNvSpPr txBox="1"/>
+          <p:nvPr/>
+        </p:nvSpPr>
+        <p:spPr>
+          <a:xfrm>
+            <a:off x="457200" y="320040"/>
+            <a:ext cx="8229600" cy="822960"/>
+          </a:xfrm>
+          <a:prstGeom prst="rect">
+            <a:avLst/>
+          </a:prstGeom>
+          <a:noFill/>
+        </p:spPr>
+        <p:txBody>
+          <a:bodyPr wrap="square">
+            <a:spAutoFit/>
+          </a:bodyPr>
+          <a:lstStyle/>
+          <a:p>
+            <a:r>
+              <a:rPr sz="2600" b="1">
+                <a:solidFill>
+                  <a:srgbClr val="0B3D2E"/>
+                </a:solidFill>
+              </a:rPr>
+              <a:t>⚠️ Errores comunes</a:t>
+            </a:r>
+          </a:p>
+        </p:txBody>
+      </p:sp>
+      <p:sp>
+        <p:nvSpPr>
+          <p:cNvPr id="3" name="TextBox 2"/>
+          <p:cNvSpPr txBox="1"/>
+          <p:nvPr/>
+        </p:nvSpPr>
+        <p:spPr>
+          <a:xfrm>
+            <a:off x="457200" y="1280160"/>
+            <a:ext cx="8229600" cy="4937760"/>
+          </a:xfrm>
+          <a:prstGeom prst="rect">
+            <a:avLst/>
+          </a:prstGeom>
+          <a:noFill/>
+        </p:spPr>
+        <p:txBody>
+          <a:bodyPr wrap="square">
+            <a:spAutoFit/>
+          </a:bodyPr>
+          <a:lstStyle/>
+          <a:p>
+            <a:pPr>
+              <a:spcAft>
+                <a:spcPts val="600"/>
+              </a:spcAft>
+            </a:pPr>
+            <a:r>
+              <a:rPr sz="1500">
+                <a:solidFill>
+                  <a:srgbClr val="22282E"/>
+                </a:solidFill>
+              </a:rPr>
+              <a:t>•  "Pensé que namespace = aislamiento fuerte" — Los namespaces separan nombres, no red ni kernel; añade NetworkPolicy y RBAC.</a:t>
+            </a:r>
+          </a:p>
+          <a:p>
+            <a:pPr>
+              <a:spcAft>
+                <a:spcPts val="600"/>
+              </a:spcAft>
+            </a:pPr>
+            <a:r>
+              <a:rPr sz="1500">
+                <a:solidFill>
+                  <a:srgbClr val="22282E"/>
+                </a:solidFill>
+              </a:rPr>
+              <a:t>•  Token de ServiceAccount montado sin necesidad — Riesgo si el pod se compromete; usa automountServiceAccountToken: false.</a:t>
+            </a:r>
+          </a:p>
+          <a:p>
+            <a:pPr>
+              <a:spcAft>
+                <a:spcPts val="600"/>
+              </a:spcAft>
+            </a:pPr>
+            <a:r>
+              <a:rPr sz="1500">
+                <a:solidFill>
+                  <a:srgbClr val="22282E"/>
+                </a:solidFill>
+              </a:rPr>
+              <a:t>•  etcd accesible sin TLS — Exposición total del estado; exige TLS mutuo y restringe el acceso.</a:t>
+            </a:r>
+          </a:p>
+          <a:p>
+            <a:pPr>
+              <a:spcAft>
+                <a:spcPts val="600"/>
+              </a:spcAft>
+            </a:pPr>
+            <a:r>
+              <a:rPr sz="1500">
+                <a:solidFill>
+                  <a:srgbClr val="22282E"/>
+                </a:solidFill>
+              </a:rPr>
+              <a:t>•  Forbidden al aplicar un manifiesto — RBAC deniega la acción; ajusta el Role/Binding de la identidad.</a:t>
+            </a:r>
+          </a:p>
+          <a:p>
+            <a:pPr>
+              <a:spcAft>
+                <a:spcPts val="600"/>
+              </a:spcAft>
+            </a:pPr>
+            <a:r>
+              <a:rPr sz="1500">
+                <a:solidFill>
+                  <a:srgbClr val="22282E"/>
+                </a:solidFill>
+              </a:rPr>
+              <a:t>•  kubelet API abierta en 10250 — Permite exec en pods; exige autenticación y autorización webhook.</a:t>
+            </a:r>
+          </a:p>
+        </p:txBody>
+      </p:sp>
+    </p:spTree>
+  </p:cSld>
+  <p:clrMapOvr>
+    <a:masterClrMapping/>
+  </p:clrMapOvr>
+</p:sld>
+</file>
+
+<file path=ppt/slides/slide14.xml><?xml version="1.0" encoding="utf-8"?>
+<p:sld xmlns:a="http://schemas.openxmlformats.org/drawingml/2006/main" xmlns:p="http://schemas.openxmlformats.org/presentationml/2006/main" xmlns:r="http://schemas.openxmlformats.org/officeDocument/2006/relationships">
+  <p:cSld>
+    <p:spTree>
+      <p:nvGrpSpPr>
+        <p:cNvPr id="1" name=""/>
+        <p:cNvGrpSpPr/>
+        <p:nvPr/>
+      </p:nvGrpSpPr>
+      <p:grpSpPr/>
+      <p:sp>
+        <p:nvSpPr>
+          <p:cNvPr id="2" name="TextBox 1"/>
+          <p:cNvSpPr txBox="1"/>
+          <p:nvPr/>
+        </p:nvSpPr>
+        <p:spPr>
+          <a:xfrm>
+            <a:off x="457200" y="320040"/>
+            <a:ext cx="8229600" cy="822960"/>
+          </a:xfrm>
+          <a:prstGeom prst="rect">
+            <a:avLst/>
+          </a:prstGeom>
+          <a:noFill/>
+        </p:spPr>
+        <p:txBody>
+          <a:bodyPr wrap="square">
+            <a:spAutoFit/>
+          </a:bodyPr>
+          <a:lstStyle/>
+          <a:p>
+            <a:r>
+              <a:rPr sz="2600" b="1">
+                <a:solidFill>
+                  <a:srgbClr val="0B3D2E"/>
+                </a:solidFill>
+              </a:rPr>
+              <a:t>❓ Preguntas frecuentes</a:t>
+            </a:r>
+          </a:p>
+        </p:txBody>
+      </p:sp>
+      <p:sp>
+        <p:nvSpPr>
+          <p:cNvPr id="3" name="TextBox 2"/>
+          <p:cNvSpPr txBox="1"/>
+          <p:nvPr/>
+        </p:nvSpPr>
+        <p:spPr>
+          <a:xfrm>
+            <a:off x="457200" y="1280160"/>
+            <a:ext cx="8229600" cy="4937760"/>
+          </a:xfrm>
+          <a:prstGeom prst="rect">
+            <a:avLst/>
+          </a:prstGeom>
+          <a:noFill/>
+        </p:spPr>
+        <p:txBody>
+          <a:bodyPr wrap="square">
+            <a:spAutoFit/>
+          </a:bodyPr>
+          <a:lstStyle/>
+          <a:p>
+            <a:pPr>
+              <a:spcAft>
+                <a:spcPts val="600"/>
+              </a:spcAft>
+            </a:pPr>
+            <a:r>
+              <a:rPr sz="1500">
+                <a:solidFill>
+                  <a:srgbClr val="22282E"/>
+                </a:solidFill>
+              </a:rPr>
+              <a:t>•  ❓ ¿Por qué el API server es el objetivo principal de un atacante?</a:t>
+            </a:r>
+          </a:p>
+          <a:p>
+            <a:pPr>
+              <a:spcAft>
+                <a:spcPts val="600"/>
+              </a:spcAft>
+            </a:pPr>
+            <a:r>
+              <a:rPr sz="1500">
+                <a:solidFill>
+                  <a:srgbClr val="22282E"/>
+                </a:solidFill>
+              </a:rPr>
+              <a:t>•  Porque media cambios declarativos y expone recursos según autorización. Protegerlo es central, pero kubelet, etcd, nodos, runtime y red también poseen superficies que pueden evitar controles…</a:t>
+            </a:r>
+          </a:p>
+          <a:p>
+            <a:pPr>
+              <a:spcAft>
+                <a:spcPts val="600"/>
+              </a:spcAft>
+            </a:pPr>
+            <a:r>
+              <a:rPr sz="1500">
+                <a:solidFill>
+                  <a:srgbClr val="22282E"/>
+                </a:solidFill>
+              </a:rPr>
+              <a:t>•  ❓ ¿Qué pasa si un atacante lee etcd directamente?</a:t>
+            </a:r>
+          </a:p>
+          <a:p>
+            <a:pPr>
+              <a:spcAft>
+                <a:spcPts val="600"/>
+              </a:spcAft>
+            </a:pPr>
+            <a:r>
+              <a:rPr sz="1500">
+                <a:solidFill>
+                  <a:srgbClr val="22282E"/>
+                </a:solidFill>
+              </a:rPr>
+              <a:t>•  Puede leer el estado persistido accesible, incluidos Secrets almacenados allí. El impacto depende de permisos y cifrado configurado; se restringen red y certificados, se cifra material sensible y se…</a:t>
+            </a:r>
+          </a:p>
+          <a:p>
+            <a:pPr>
+              <a:spcAft>
+                <a:spcPts val="600"/>
+              </a:spcAft>
+            </a:pPr>
+            <a:r>
+              <a:rPr sz="1500">
+                <a:solidFill>
+                  <a:srgbClr val="22282E"/>
+                </a:solidFill>
+              </a:rPr>
+              <a:t>•  ❓ ¿RBAC está activo por defecto?</a:t>
+            </a:r>
+          </a:p>
+          <a:p>
+            <a:pPr>
+              <a:spcAft>
+                <a:spcPts val="600"/>
+              </a:spcAft>
+            </a:pPr>
+            <a:r>
+              <a:rPr sz="1500">
+                <a:solidFill>
+                  <a:srgbClr val="22282E"/>
+                </a:solidFill>
+              </a:rPr>
+              <a:t>•  En clústeres modernos sí, pero muchas instalaciones dejan roles amplios o ServiceAccounts con permisos excesivos. RBAC solo protege si se configura con privilegio mínimo.</a:t>
+            </a:r>
+          </a:p>
+        </p:txBody>
+      </p:sp>
+    </p:spTree>
+  </p:cSld>
+  <p:clrMapOvr>
+    <a:masterClrMapping/>
+  </p:clrMapOvr>
+</p:sld>
+</file>
+
+<file path=ppt/slides/slide15.xml><?xml version="1.0" encoding="utf-8"?>
+<p:sld xmlns:a="http://schemas.openxmlformats.org/drawingml/2006/main" xmlns:p="http://schemas.openxmlformats.org/presentationml/2006/main" xmlns:r="http://schemas.openxmlformats.org/officeDocument/2006/relationships">
+  <p:cSld>
+    <p:spTree>
+      <p:nvGrpSpPr>
+        <p:cNvPr id="1" name=""/>
+        <p:cNvGrpSpPr/>
+        <p:nvPr/>
+      </p:nvGrpSpPr>
+      <p:grpSpPr/>
+      <p:sp>
+        <p:nvSpPr>
+          <p:cNvPr id="2" name="TextBox 1"/>
+          <p:cNvSpPr txBox="1"/>
+          <p:nvPr/>
+        </p:nvSpPr>
+        <p:spPr>
+          <a:xfrm>
+            <a:off x="457200" y="320040"/>
+            <a:ext cx="8229600" cy="822960"/>
+          </a:xfrm>
+          <a:prstGeom prst="rect">
+            <a:avLst/>
+          </a:prstGeom>
+          <a:noFill/>
+        </p:spPr>
+        <p:txBody>
+          <a:bodyPr wrap="square">
+            <a:spAutoFit/>
+          </a:bodyPr>
+          <a:lstStyle/>
+          <a:p>
+            <a:r>
+              <a:rPr sz="2600" b="1">
+                <a:solidFill>
+                  <a:srgbClr val="0B3D2E"/>
+                </a:solidFill>
+              </a:rPr>
+              <a:t>🔗 Referencias verificables y alcance</a:t>
+            </a:r>
+          </a:p>
+        </p:txBody>
+      </p:sp>
+      <p:sp>
+        <p:nvSpPr>
+          <p:cNvPr id="3" name="TextBox 2"/>
+          <p:cNvSpPr txBox="1"/>
+          <p:nvPr/>
+        </p:nvSpPr>
+        <p:spPr>
+          <a:xfrm>
+            <a:off x="457200" y="1280160"/>
+            <a:ext cx="8229600" cy="4937760"/>
+          </a:xfrm>
+          <a:prstGeom prst="rect">
+            <a:avLst/>
+          </a:prstGeom>
+          <a:noFill/>
+        </p:spPr>
+        <p:txBody>
+          <a:bodyPr wrap="square">
+            <a:spAutoFit/>
+          </a:bodyPr>
+          <a:lstStyle/>
+          <a:p>
+            <a:pPr>
+              <a:spcAft>
+                <a:spcPts val="600"/>
+              </a:spcAft>
+            </a:pPr>
+            <a:r>
+              <a:rPr sz="1500">
+                <a:solidFill>
+                  <a:srgbClr val="22282E"/>
+                </a:solidFill>
+              </a:rPr>
+              <a:t>•  Kubernetes — Cluster Architecture. &lt;https://kubernetes.io/docs/concepts/architecture/&gt; — componentes y reconciliación oficiales.</a:t>
+            </a:r>
+          </a:p>
+          <a:p>
+            <a:pPr>
+              <a:spcAft>
+                <a:spcPts val="600"/>
+              </a:spcAft>
+            </a:pPr>
+            <a:r>
+              <a:rPr sz="1500">
+                <a:solidFill>
+                  <a:srgbClr val="22282E"/>
+                </a:solidFill>
+              </a:rPr>
+              <a:t>•  Kubernetes — Controlling Access to the API. &lt;https://kubernetes.io/docs/concepts/security/controlling-access/&gt; — secuencia oficial de autenticación, autorización y admisión.</a:t>
+            </a:r>
+          </a:p>
+          <a:p>
+            <a:pPr>
+              <a:spcAft>
+                <a:spcPts val="600"/>
+              </a:spcAft>
+            </a:pPr>
+            <a:r>
+              <a:rPr sz="1500">
+                <a:solidFill>
+                  <a:srgbClr val="22282E"/>
+                </a:solidFill>
+              </a:rPr>
+              <a:t>•  Kubernetes — RBAC Authorization. &lt;https://kubernetes.io/docs/reference/access-authn-authz/rbac/&gt; — semántica de roles, bindings y verbos.</a:t>
+            </a:r>
+          </a:p>
+          <a:p>
+            <a:pPr>
+              <a:spcAft>
+                <a:spcPts val="600"/>
+              </a:spcAft>
+            </a:pPr>
+            <a:r>
+              <a:rPr sz="1500">
+                <a:solidFill>
+                  <a:srgbClr val="22282E"/>
+                </a:solidFill>
+              </a:rPr>
+              <a:t>•  Kubernetes — Security Checklist. &lt;https://kubernetes.io/docs/concepts/security/security-checklist/&gt; — recomendaciones actuales, incluidas Secrets y tokens.</a:t>
+            </a:r>
+          </a:p>
+          <a:p>
+            <a:pPr>
+              <a:spcAft>
+                <a:spcPts val="600"/>
+              </a:spcAft>
+            </a:pPr>
+            <a:r>
+              <a:rPr sz="1500">
+                <a:solidFill>
+                  <a:srgbClr val="22282E"/>
+                </a:solidFill>
+              </a:rPr>
+              <a:t>•  NIST SP 800-190. &lt;https://doi.org/10.6028/NIST.SP.800-190&gt; — guía de riesgos de contenedores; complementar con versión Kubernetes desplegada.</a:t>
+            </a:r>
+          </a:p>
+          <a:p>
+            <a:pPr>
+              <a:spcAft>
+                <a:spcPts val="600"/>
+              </a:spcAft>
+            </a:pPr>
+            <a:r>
+              <a:rPr sz="1500">
+                <a:solidFill>
+                  <a:srgbClr val="22282E"/>
+                </a:solidFill>
+              </a:rPr>
+              <a:t>•  Martin y Hausenblas, Hacking Kubernetes. &lt;https://www.oreilly.com/library/view/hacking-kubernetes/9781492081722/&gt; — ejemplos complementarios, no documentación normativa.</a:t>
+            </a:r>
+          </a:p>
+        </p:txBody>
+      </p:sp>
+    </p:spTree>
+  </p:cSld>
+  <p:clrMapOvr>
+    <a:masterClrMapping/>
+  </p:clrMapOvr>
+</p:sld>
+</file>
+
+<file path=ppt/slides/slide16.xml><?xml version="1.0" encoding="utf-8"?>
+<p:sld xmlns:a="http://schemas.openxmlformats.org/drawingml/2006/main" xmlns:p="http://schemas.openxmlformats.org/presentationml/2006/main" xmlns:r="http://schemas.openxmlformats.org/officeDocument/2006/relationships">
+  <p:cSld>
+    <p:spTree>
+      <p:nvGrpSpPr>
+        <p:cNvPr id="1" name=""/>
+        <p:cNvGrpSpPr/>
+        <p:nvPr/>
+      </p:nvGrpSpPr>
+      <p:grpSpPr/>
+      <p:sp>
+        <p:nvSpPr>
+          <p:cNvPr id="2" name="TextBox 1"/>
+          <p:cNvSpPr txBox="1"/>
+          <p:nvPr/>
+        </p:nvSpPr>
+        <p:spPr>
+          <a:xfrm>
+            <a:off x="457200" y="274320"/>
+            <a:ext cx="8229600" cy="640080"/>
+          </a:xfrm>
+          <a:prstGeom prst="rect">
+            <a:avLst/>
+          </a:prstGeom>
+          <a:noFill/>
+        </p:spPr>
+        <p:txBody>
+          <a:bodyPr wrap="square">
+            <a:spAutoFit/>
+          </a:bodyPr>
+          <a:lstStyle/>
+          <a:p>
+            <a:r>
+              <a:rPr sz="2200" b="1">
+                <a:solidFill>
+                  <a:srgbClr val="0B3D2E"/>
+                </a:solidFill>
+              </a:rPr>
+              <a:t>Diagrama de la clase</a:t>
+            </a:r>
+          </a:p>
+        </p:txBody>
+      </p:sp>
+      <p:pic>
+        <p:nvPicPr>
+          <p:cNvPr id="3" name="Picture 2" descr="56918c172ea31e11.png"/>
+          <p:cNvPicPr>
+            <a:picLocks noChangeAspect="1"/>
+          </p:cNvPicPr>
+          <p:nvPr/>
+        </p:nvPicPr>
+        <p:blipFill>
+          <a:blip r:embed="rId2"/>
+          <a:stretch>
+            <a:fillRect/>
+          </a:stretch>
+        </p:blipFill>
+        <p:spPr>
+          <a:xfrm>
+            <a:off x="457200" y="2135124"/>
+            <a:ext cx="8229600" cy="3227832"/>
+          </a:xfrm>
+          <a:prstGeom prst="rect">
+            <a:avLst/>
+          </a:prstGeom>
+        </p:spPr>
+      </p:pic>
     </p:spTree>
   </p:cSld>
   <p:clrMapOvr>
@@ -4137,7 +4723,7 @@
                   <a:srgbClr val="0B3D2E"/>
                 </a:solidFill>
               </a:rPr>
-              <a:t>📖 Definiciones y características</a:t>
+              <a:t>🧠 Explicación en profundidad</a:t>
             </a:r>
           </a:p>
         </p:txBody>
@@ -4175,97 +4761,97 @@
                   <a:srgbClr val="22282E"/>
                 </a:solidFill>
               </a:rPr>
-              <a:t>•  API server: frontend REST del plano de control. Clave: toda operación pasa por authn, authz y admission aquí.</a:t>
-            </a:r>
-          </a:p>
-          <a:p>
-            <a:pPr>
-              <a:spcAft>
-                <a:spcPts val="600"/>
-              </a:spcAft>
-            </a:pPr>
-            <a:r>
-              <a:rPr sz="1500">
-                <a:solidFill>
-                  <a:srgbClr val="22282E"/>
-                </a:solidFill>
-              </a:rPr>
-              <a:t>•  etcd: base clave-valor con el estado del clúster. Clave: contiene los Secrets; su compromiso equivale a comprometer el clúster.</a:t>
-            </a:r>
-          </a:p>
-          <a:p>
-            <a:pPr>
-              <a:spcAft>
-                <a:spcPts val="600"/>
-              </a:spcAft>
-            </a:pPr>
-            <a:r>
-              <a:rPr sz="1500">
-                <a:solidFill>
-                  <a:srgbClr val="22282E"/>
-                </a:solidFill>
-              </a:rPr>
-              <a:t>•  kubelet: agente que ejecuta pods en cada nodo. Clave: su API (10250) sin autenticación permite ejecutar en pods.</a:t>
-            </a:r>
-          </a:p>
-          <a:p>
-            <a:pPr>
-              <a:spcAft>
-                <a:spcPts val="600"/>
-              </a:spcAft>
-            </a:pPr>
-            <a:r>
-              <a:rPr sz="1500">
-                <a:solidFill>
-                  <a:srgbClr val="22282E"/>
-                </a:solidFill>
-              </a:rPr>
-              <a:t>•  RBAC: control de acceso por roles (Role/ClusterRole + Binding). Clave: privilegio mínimo dentro del clúster.</a:t>
-            </a:r>
-          </a:p>
-          <a:p>
-            <a:pPr>
-              <a:spcAft>
-                <a:spcPts val="600"/>
-              </a:spcAft>
-            </a:pPr>
-            <a:r>
-              <a:rPr sz="1500">
-                <a:solidFill>
-                  <a:srgbClr val="22282E"/>
-                </a:solidFill>
-              </a:rPr>
-              <a:t>•  ServiceAccount: identidad de los pods frente al API server. Clave: su token, si se roba, da acceso a la API.</a:t>
-            </a:r>
-          </a:p>
-          <a:p>
-            <a:pPr>
-              <a:spcAft>
-                <a:spcPts val="600"/>
-              </a:spcAft>
-            </a:pPr>
-            <a:r>
-              <a:rPr sz="1500">
-                <a:solidFill>
-                  <a:srgbClr val="22282E"/>
-                </a:solidFill>
-              </a:rPr>
-              <a:t>•  Admission controller: valida/mutila objetos antes de persistirlos (p. ej. Pod Security Admission). Clave: fuerza políticas de seguridad.</a:t>
-            </a:r>
-          </a:p>
-          <a:p>
-            <a:pPr>
-              <a:spcAft>
-                <a:spcPts val="600"/>
-              </a:spcAft>
-            </a:pPr>
-            <a:r>
-              <a:rPr sz="1500">
-                <a:solidFill>
-                  <a:srgbClr val="22282E"/>
-                </a:solidFill>
-              </a:rPr>
-              <a:t>•  NetworkPolicy: firewall L3/L4 entre pods. Clave: sin ella, todos los pods se comunican libremente.</a:t>
+              <a:t>•  Kubernetes mantiene un estado deseado mediante controladores. El usuario envía objetos al API server; después autenticación, autorización y admission determinan si se aceptan. etcd conserva el estado…</a:t>
+            </a:r>
+          </a:p>
+          <a:p>
+            <a:pPr>
+              <a:spcAft>
+                <a:spcPts val="600"/>
+              </a:spcAft>
+            </a:pPr>
+            <a:r>
+              <a:rPr sz="1500">
+                <a:solidFill>
+                  <a:srgbClr val="22282E"/>
+                </a:solidFill>
+              </a:rPr>
+              <a:t>•  El diagrama muestra que no «todo» tráfico del clúster pasa por el API server: las operaciones declarativas sí, pero el tráfico entre aplicaciones sigue otra ruta. Un control de admission puede…</a:t>
+            </a:r>
+          </a:p>
+          <a:p>
+            <a:pPr>
+              <a:spcAft>
+                <a:spcPts val="600"/>
+              </a:spcAft>
+            </a:pPr>
+            <a:r>
+              <a:rPr sz="1500">
+                <a:solidFill>
+                  <a:srgbClr val="22282E"/>
+                </a:solidFill>
+              </a:rPr>
+              <a:t>•  Autenticación establece nombre y grupos; autorización decide verbos sobre recursos; admission examina o modifica el objeto después de autorizar y antes de persistir. RBAC combina Role/ClusterRole con…</a:t>
+            </a:r>
+          </a:p>
+          <a:p>
+            <a:pPr>
+              <a:spcAft>
+                <a:spcPts val="600"/>
+              </a:spcAft>
+            </a:pPr>
+            <a:r>
+              <a:rPr sz="1500">
+                <a:solidFill>
+                  <a:srgbClr val="22282E"/>
+                </a:solidFill>
+              </a:rPr>
+              <a:t>•  ServiceAccounts son identidades namespaced para workloads. Los tokens proyectados actuales pueden tener audiencia y expiración, pero un Pod comprometido puede usarlos mientras sean válidos. Se…</a:t>
+            </a:r>
+          </a:p>
+          <a:p>
+            <a:pPr>
+              <a:spcAft>
+                <a:spcPts val="600"/>
+              </a:spcAft>
+            </a:pPr>
+            <a:r>
+              <a:rPr sz="1500">
+                <a:solidFill>
+                  <a:srgbClr val="22282E"/>
+                </a:solidFill>
+              </a:rPr>
+              <a:t>•  etcd debe usar autenticación mutua, red restringida, backups protegidos y cifrado de recursos sensibles cuando corresponda. Kubernetes Secret usa base64 en su representación, no cifrado por ese…</a:t>
+            </a:r>
+          </a:p>
+          <a:p>
+            <a:pPr>
+              <a:spcAft>
+                <a:spcPts val="600"/>
+              </a:spcAft>
+            </a:pPr>
+            <a:r>
+              <a:rPr sz="1500">
+                <a:solidFill>
+                  <a:srgbClr val="22282E"/>
+                </a:solidFill>
+              </a:rPr>
+              <a:t>•  kubelet ejecuta Pods asignados y expone APIs operativas. Autenticación, autorización webhook, certificados y acceso a nodes/proxy importan. Comprometer un nodo puede exponer workloads y credenciales…</a:t>
+            </a:r>
+          </a:p>
+          <a:p>
+            <a:pPr>
+              <a:spcAft>
+                <a:spcPts val="600"/>
+              </a:spcAft>
+            </a:pPr>
+            <a:r>
+              <a:rPr sz="1500">
+                <a:solidFill>
+                  <a:srgbClr val="22282E"/>
+                </a:solidFill>
+              </a:rPr>
+              <a:t>•  Namespaces organizan nombres, cuotas, RBAC y políticas namespaced; no crean aislamiento de kernel ni red automáticamente. NetworkPolicy funciona solo si el plugin de red la implementa y selecciona…</a:t>
             </a:r>
           </a:p>
         </p:txBody>
@@ -4316,7 +4902,7 @@
                   <a:srgbClr val="0B3D2E"/>
                 </a:solidFill>
               </a:rPr>
-              <a:t>🧰 Herramientas y preparación</a:t>
+              <a:t>📖 Definiciones y características</a:t>
             </a:r>
           </a:p>
         </p:txBody>
@@ -4354,82 +4940,97 @@
                   <a:srgbClr val="22282E"/>
                 </a:solidFill>
               </a:rPr>
-              <a:t>•  kind o minikube para un clúster local de laboratorio.</a:t>
-            </a:r>
-          </a:p>
-          <a:p>
-            <a:pPr>
-              <a:spcAft>
-                <a:spcPts val="600"/>
-              </a:spcAft>
-            </a:pPr>
-            <a:r>
-              <a:rPr sz="1500">
-                <a:solidFill>
-                  <a:srgbClr val="22282E"/>
-                </a:solidFill>
-              </a:rPr>
-              <a:t>•  kubectl configurado; kube-bench y kubeaudit (se profundizan en la clase 229).</a:t>
-            </a:r>
-          </a:p>
-          <a:p>
-            <a:pPr>
-              <a:spcAft>
-                <a:spcPts val="600"/>
-              </a:spcAft>
-            </a:pPr>
-            <a:r>
-              <a:rPr sz="1500">
-                <a:solidFill>
-                  <a:srgbClr val="22282E"/>
-                </a:solidFill>
-              </a:rPr>
-              <a:t>•  Opcional: Lens o k9s para visualizar el clúster.</a:t>
-            </a:r>
-          </a:p>
-          <a:p>
-            <a:pPr>
-              <a:spcAft>
-                <a:spcPts val="600"/>
-              </a:spcAft>
-            </a:pPr>
-            <a:r>
-              <a:rPr sz="1500">
-                <a:solidFill>
-                  <a:srgbClr val="22282E"/>
-                </a:solidFill>
-              </a:rPr>
-              <a:t>•  kind create cluster --name lab</a:t>
-            </a:r>
-          </a:p>
-          <a:p>
-            <a:pPr>
-              <a:spcAft>
-                <a:spcPts val="600"/>
-              </a:spcAft>
-            </a:pPr>
-            <a:r>
-              <a:rPr sz="1500">
-                <a:solidFill>
-                  <a:srgbClr val="22282E"/>
-                </a:solidFill>
-              </a:rPr>
-              <a:t>•  kubectl get pods -n kube-system</a:t>
-            </a:r>
-          </a:p>
-          <a:p>
-            <a:pPr>
-              <a:spcAft>
-                <a:spcPts val="600"/>
-              </a:spcAft>
-            </a:pPr>
-            <a:r>
-              <a:rPr sz="1500">
-                <a:solidFill>
-                  <a:srgbClr val="22282E"/>
-                </a:solidFill>
-              </a:rPr>
-              <a:t>•  kubectl auth can-i create pods --as system:serviceaccount:default:default</a:t>
+              <a:t>•  API server: frontend del plano de control para operaciones de recursos Kubernetes. Clave: procesa autenticación, autorización y admission; el tráfico de aplicación no sigue necesariamente esa ruta.</a:t>
+            </a:r>
+          </a:p>
+          <a:p>
+            <a:pPr>
+              <a:spcAft>
+                <a:spcPts val="600"/>
+              </a:spcAft>
+            </a:pPr>
+            <a:r>
+              <a:rPr sz="1500">
+                <a:solidFill>
+                  <a:srgbClr val="22282E"/>
+                </a:solidFill>
+              </a:rPr>
+              <a:t>•  etcd: almacén consistente del estado persistido por Kubernetes. Clave: puede contener Secrets y credenciales; acceso, transporte, backups y cifrado requieren protección.</a:t>
+            </a:r>
+          </a:p>
+          <a:p>
+            <a:pPr>
+              <a:spcAft>
+                <a:spcPts val="600"/>
+              </a:spcAft>
+            </a:pPr>
+            <a:r>
+              <a:rPr sz="1500">
+                <a:solidFill>
+                  <a:srgbClr val="22282E"/>
+                </a:solidFill>
+              </a:rPr>
+              <a:t>•  kubelet: agente de nodo que administra Pods asignados. Clave: sus APIs requieren autenticación y autorización; permisos proxy también amplían acceso.</a:t>
+            </a:r>
+          </a:p>
+          <a:p>
+            <a:pPr>
+              <a:spcAft>
+                <a:spcPts val="600"/>
+              </a:spcAft>
+            </a:pPr>
+            <a:r>
+              <a:rPr sz="1500">
+                <a:solidFill>
+                  <a:srgbClr val="22282E"/>
+                </a:solidFill>
+              </a:rPr>
+              <a:t>•  RBAC: control de acceso por roles (Role/ClusterRole + Binding). Clave: privilegio mínimo dentro del clúster.</a:t>
+            </a:r>
+          </a:p>
+          <a:p>
+            <a:pPr>
+              <a:spcAft>
+                <a:spcPts val="600"/>
+              </a:spcAft>
+            </a:pPr>
+            <a:r>
+              <a:rPr sz="1500">
+                <a:solidFill>
+                  <a:srgbClr val="22282E"/>
+                </a:solidFill>
+              </a:rPr>
+              <a:t>•  ServiceAccount: identidad de los pods frente al API server. Clave: su token, si se roba, da acceso a la API.</a:t>
+            </a:r>
+          </a:p>
+          <a:p>
+            <a:pPr>
+              <a:spcAft>
+                <a:spcPts val="600"/>
+              </a:spcAft>
+            </a:pPr>
+            <a:r>
+              <a:rPr sz="1500">
+                <a:solidFill>
+                  <a:srgbClr val="22282E"/>
+                </a:solidFill>
+              </a:rPr>
+              <a:t>•  Admission controller: valida o muta objetos antes de persistirlos. Clave: aplica políticas sobre solicitudes admitidas, con alcance y excepciones configurables.</a:t>
+            </a:r>
+          </a:p>
+          <a:p>
+            <a:pPr>
+              <a:spcAft>
+                <a:spcPts val="600"/>
+              </a:spcAft>
+            </a:pPr>
+            <a:r>
+              <a:rPr sz="1500">
+                <a:solidFill>
+                  <a:srgbClr val="22282E"/>
+                </a:solidFill>
+              </a:rPr>
+              <a:t>•  NetworkPolicy: API para expresar aislamiento L3/L4 según selección y direcciones. Clave: el efecto depende del CNI, políticas aplicables y flujos permitidos.</a:t>
             </a:r>
           </a:p>
         </p:txBody>
@@ -4480,7 +5081,7 @@
                   <a:srgbClr val="0B3D2E"/>
                 </a:solidFill>
               </a:rPr>
-              <a:t>🧪 Laboratorio guiado</a:t>
+              <a:t>🔍 Caso razonado — Pod sin token que necesita hablar con una API externa</a:t>
             </a:r>
           </a:p>
         </p:txBody>
@@ -4518,97 +5119,22 @@
                   <a:srgbClr val="22282E"/>
                 </a:solidFill>
               </a:rPr>
-              <a:t>•  Crea un clúster con kind create cluster y examina los pods de kube-system (API server, etcd, scheduler, controller-manager, kube-proxy, CoreDNS).</a:t>
-            </a:r>
-          </a:p>
-          <a:p>
-            <a:pPr>
-              <a:spcAft>
-                <a:spcPts val="600"/>
-              </a:spcAft>
-            </a:pPr>
-            <a:r>
-              <a:rPr sz="1500">
-                <a:solidFill>
-                  <a:srgbClr val="22282E"/>
-                </a:solidFill>
-              </a:rPr>
-              <a:t>•  Describe el pod de etcd y localiza dónde guarda los datos; comenta por qué su cifrado en reposo y su acceso restringido son críticos.</a:t>
-            </a:r>
-          </a:p>
-          <a:p>
-            <a:pPr>
-              <a:spcAft>
-                <a:spcPts val="600"/>
-              </a:spcAft>
-            </a:pPr>
-            <a:r>
-              <a:rPr sz="1500">
-                <a:solidFill>
-                  <a:srgbClr val="22282E"/>
-                </a:solidFill>
-              </a:rPr>
-              <a:t>•  Explora el flujo de autorización: usa kubectl auth can-i --list con distintas identidades para ver qué puede hacer cada una.</a:t>
-            </a:r>
-          </a:p>
-          <a:p>
-            <a:pPr>
-              <a:spcAft>
-                <a:spcPts val="600"/>
-              </a:spcAft>
-            </a:pPr>
-            <a:r>
-              <a:rPr sz="1500">
-                <a:solidFill>
-                  <a:srgbClr val="22282E"/>
-                </a:solidFill>
-              </a:rPr>
-              <a:t>•  Crea un namespace app y despliega un pod; observa el ServiceAccount por defecto y su token montado.</a:t>
-            </a:r>
-          </a:p>
-          <a:p>
-            <a:pPr>
-              <a:spcAft>
-                <a:spcPts val="600"/>
-              </a:spcAft>
-            </a:pPr>
-            <a:r>
-              <a:rPr sz="1500">
-                <a:solidFill>
-                  <a:srgbClr val="22282E"/>
-                </a:solidFill>
-              </a:rPr>
-              <a:t>•  Comprueba que, por defecto, un pod puede alcanzar a otro en distinto namespace (sin NetworkPolicy).</a:t>
-            </a:r>
-          </a:p>
-          <a:p>
-            <a:pPr>
-              <a:spcAft>
-                <a:spcPts val="600"/>
-              </a:spcAft>
-            </a:pPr>
-            <a:r>
-              <a:rPr sz="1500">
-                <a:solidFill>
-                  <a:srgbClr val="22282E"/>
-                </a:solidFill>
-              </a:rPr>
-              <a:t>•  Inspecciona la API del kubelet (solo lectura, en laboratorio) y comenta por qué debe requerir autenticación.</a:t>
-            </a:r>
-          </a:p>
-          <a:p>
-            <a:pPr>
-              <a:spcAft>
-                <a:spcPts val="600"/>
-              </a:spcAft>
-            </a:pPr>
-            <a:r>
-              <a:rPr sz="1500">
-                <a:solidFill>
-                  <a:srgbClr val="22282E"/>
-                </a:solidFill>
-              </a:rPr>
-              <a:t>•  Dibuja un diagrama del flujo de una petición kubectl apply: cliente → API server → authn → authz (RBAC) → admission → etcd → controladores → kubelet.</a:t>
+              <a:t>•  Una aplicación solo consume una API externa y no necesita Kubernetes API. El manifiesto establece automountServiceAccountToken: false; RBAC no concede permisos y NetworkPolicy permite DNS y el…</a:t>
+            </a:r>
+          </a:p>
+          <a:p>
+            <a:pPr>
+              <a:spcAft>
+                <a:spcPts val="600"/>
+              </a:spcAft>
+            </a:pPr>
+            <a:r>
+              <a:rPr sz="1500">
+                <a:solidFill>
+                  <a:srgbClr val="22282E"/>
+                </a:solidFill>
+              </a:rPr>
+              <a:t>•  La prueba usa kubectl auth can-i para casos positivos y negativos, inspecciona mounts del Pod y valida flujos. El caso muestra que identidad, admisión y red son capas distintas y que una necesidad…</a:t>
             </a:r>
           </a:p>
         </p:txBody>
@@ -4659,7 +5185,7 @@
                   <a:srgbClr val="0B3D2E"/>
                 </a:solidFill>
               </a:rPr>
-              <a:t>✍️ Ejercicios</a:t>
+              <a:t>✅ Criterio de dominio</a:t>
             </a:r>
           </a:p>
         </p:txBody>
@@ -4697,82 +5223,7 @@
                   <a:srgbClr val="22282E"/>
                 </a:solidFill>
               </a:rPr>
-              <a:t>•  Enumera cada componente del plano de control y una consecuencia de su compromiso.</a:t>
-            </a:r>
-          </a:p>
-          <a:p>
-            <a:pPr>
-              <a:spcAft>
-                <a:spcPts val="600"/>
-              </a:spcAft>
-            </a:pPr>
-            <a:r>
-              <a:rPr sz="1500">
-                <a:solidFill>
-                  <a:srgbClr val="22282E"/>
-                </a:solidFill>
-              </a:rPr>
-              <a:t>•  Explica por qué etcd cifrado en reposo es una defensa clave para los Secrets.</a:t>
-            </a:r>
-          </a:p>
-          <a:p>
-            <a:pPr>
-              <a:spcAft>
-                <a:spcPts val="600"/>
-              </a:spcAft>
-            </a:pPr>
-            <a:r>
-              <a:rPr sz="1500">
-                <a:solidFill>
-                  <a:srgbClr val="22282E"/>
-                </a:solidFill>
-              </a:rPr>
-              <a:t>•  Describe la diferencia entre Role y ClusterRole con un ejemplo.</a:t>
-            </a:r>
-          </a:p>
-          <a:p>
-            <a:pPr>
-              <a:spcAft>
-                <a:spcPts val="600"/>
-              </a:spcAft>
-            </a:pPr>
-            <a:r>
-              <a:rPr sz="1500">
-                <a:solidFill>
-                  <a:srgbClr val="22282E"/>
-                </a:solidFill>
-              </a:rPr>
-              <a:t>•  Identifica qué escucha en los puertos 6443 y 10250 y su riesgo.</a:t>
-            </a:r>
-          </a:p>
-          <a:p>
-            <a:pPr>
-              <a:spcAft>
-                <a:spcPts val="600"/>
-              </a:spcAft>
-            </a:pPr>
-            <a:r>
-              <a:rPr sz="1500">
-                <a:solidFill>
-                  <a:srgbClr val="22282E"/>
-                </a:solidFill>
-              </a:rPr>
-              <a:t>•  Dibuja el flujo authn → authz → admission para una creación de pod.</a:t>
-            </a:r>
-          </a:p>
-          <a:p>
-            <a:pPr>
-              <a:spcAft>
-                <a:spcPts val="600"/>
-              </a:spcAft>
-            </a:pPr>
-            <a:r>
-              <a:rPr sz="1500">
-                <a:solidFill>
-                  <a:srgbClr val="22282E"/>
-                </a:solidFill>
-              </a:rPr>
-              <a:t>•  Explica qué aísla un namespace y qué NO aísla por defecto.</a:t>
+              <a:t>•  Dominas la clase cuando puedes seguir una petición por authn, authz, admission, etcd y reconciliación; explicar qué no pasa por esa ruta; diseñar ServiceAccount/RBAC mínimo; y demostrar los límites…</a:t>
             </a:r>
           </a:p>
         </p:txBody>
@@ -4823,7 +5274,7 @@
                   <a:srgbClr val="0B3D2E"/>
                 </a:solidFill>
               </a:rPr>
-              <a:t>📝 Reto verificable</a:t>
+              <a:t>🧰 Herramientas y preparación</a:t>
             </a:r>
           </a:p>
         </p:txBody>
@@ -4861,67 +5312,37 @@
                   <a:srgbClr val="22282E"/>
                 </a:solidFill>
               </a:rPr>
-              <a:t>•  Despliega un clúster de laboratorio y produce un mapa de su superficie de ataque: componentes,</a:t>
-            </a:r>
-          </a:p>
-          <a:p>
-            <a:pPr>
-              <a:spcAft>
-                <a:spcPts val="600"/>
-              </a:spcAft>
-            </a:pPr>
-            <a:r>
-              <a:rPr sz="1500">
-                <a:solidFill>
-                  <a:srgbClr val="22282E"/>
-                </a:solidFill>
-              </a:rPr>
-              <a:t>•  puertos que exponen, identidad que usan y qué protege cada control (RBAC, admission, NetworkPolicy).</a:t>
-            </a:r>
-          </a:p>
-          <a:p>
-            <a:pPr>
-              <a:spcAft>
-                <a:spcPts val="600"/>
-              </a:spcAft>
-            </a:pPr>
-            <a:r>
-              <a:rPr sz="1500">
-                <a:solidFill>
-                  <a:srgbClr val="22282E"/>
-                </a:solidFill>
-              </a:rPr>
-              <a:t>•  Criterio de aceptación: el mapa lista API server, etcd, kubelet y scheduler con su puerto y riesgo;</a:t>
-            </a:r>
-          </a:p>
-          <a:p>
-            <a:pPr>
-              <a:spcAft>
-                <a:spcPts val="600"/>
-              </a:spcAft>
-            </a:pPr>
-            <a:r>
-              <a:rPr sz="1500">
-                <a:solidFill>
-                  <a:srgbClr val="22282E"/>
-                </a:solidFill>
-              </a:rPr>
-              <a:t>•  identifica el flujo authn→authz→admission; y señala al menos tres controles con el objeto Kubernetes</a:t>
-            </a:r>
-          </a:p>
-          <a:p>
-            <a:pPr>
-              <a:spcAft>
-                <a:spcPts val="600"/>
-              </a:spcAft>
-            </a:pPr>
-            <a:r>
-              <a:rPr sz="1500">
-                <a:solidFill>
-                  <a:srgbClr val="22282E"/>
-                </a:solidFill>
-              </a:rPr>
-              <a:t>•  que los implementa.</a:t>
+              <a:t>•  kind o minikube para un clúster local de laboratorio.</a:t>
+            </a:r>
+          </a:p>
+          <a:p>
+            <a:pPr>
+              <a:spcAft>
+                <a:spcPts val="600"/>
+              </a:spcAft>
+            </a:pPr>
+            <a:r>
+              <a:rPr sz="1500">
+                <a:solidFill>
+                  <a:srgbClr val="22282E"/>
+                </a:solidFill>
+              </a:rPr>
+              <a:t>•  kubectl configurado; kube-bench y kubeaudit (se profundizan en la clase 229).</a:t>
+            </a:r>
+          </a:p>
+          <a:p>
+            <a:pPr>
+              <a:spcAft>
+                <a:spcPts val="600"/>
+              </a:spcAft>
+            </a:pPr>
+            <a:r>
+              <a:rPr sz="1500">
+                <a:solidFill>
+                  <a:srgbClr val="22282E"/>
+                </a:solidFill>
+              </a:rPr>
+              <a:t>•  Opcional: Lens o k9s para visualizar el clúster.</a:t>
             </a:r>
           </a:p>
         </p:txBody>
